--- a/Smart_Campus_Access_Control_Presentation.pptx
+++ b/Smart_Campus_Access_Control_Presentation.pptx
@@ -5,18 +5,18 @@
     <p:sldMasterId id="2147483648" r:id="rId1"/>
   </p:sldMasterIdLst>
   <p:sldIdLst>
-    <p:sldId id="256" r:id="rId7"/>
-    <p:sldId id="257" r:id="rId8"/>
-    <p:sldId id="258" r:id="rId9"/>
-    <p:sldId id="259" r:id="rId10"/>
-    <p:sldId id="260" r:id="rId11"/>
-    <p:sldId id="261" r:id="rId12"/>
-    <p:sldId id="262" r:id="rId13"/>
-    <p:sldId id="263" r:id="rId14"/>
-    <p:sldId id="264" r:id="rId15"/>
-    <p:sldId id="265" r:id="rId16"/>
+    <p:sldId id="256" r:id="rId2"/>
+    <p:sldId id="257" r:id="rId3"/>
+    <p:sldId id="258" r:id="rId4"/>
+    <p:sldId id="259" r:id="rId5"/>
+    <p:sldId id="260" r:id="rId6"/>
+    <p:sldId id="261" r:id="rId7"/>
+    <p:sldId id="262" r:id="rId8"/>
+    <p:sldId id="263" r:id="rId9"/>
+    <p:sldId id="264" r:id="rId10"/>
+    <p:sldId id="265" r:id="rId11"/>
   </p:sldIdLst>
-  <p:sldSz cx="12191695" cy="6858000" type="screen4x3"/>
+  <p:sldSz cx="12192000" cy="6858000"/>
   <p:notesSz cx="6858000" cy="9144000"/>
   <p:defaultTextStyle>
     <a:defPPr>
@@ -113,6 +113,22 @@
       </a:defRPr>
     </a:lvl9pPr>
   </p:defaultTextStyle>
+  <p:extLst>
+    <p:ext uri="{EFAFB233-063F-42B5-8137-9DF3F51BA10A}">
+      <p15:sldGuideLst xmlns:p15="http://schemas.microsoft.com/office/powerpoint/2012/main">
+        <p15:guide id="1" orient="horz" pos="2160">
+          <p15:clr>
+            <a:srgbClr val="A4A3A4"/>
+          </p15:clr>
+        </p15:guide>
+        <p15:guide id="2" pos="2880">
+          <p15:clr>
+            <a:srgbClr val="A4A3A4"/>
+          </p15:clr>
+        </p15:guide>
+      </p15:sldGuideLst>
+    </p:ext>
+  </p:extLst>
 </p:presentation>
 </file>
 
@@ -154,10 +170,9 @@
           <a:lstStyle/>
           <a:p>
             <a:r>
-              <a:rPr lang="en-US" smtClean="0"/>
+              <a:rPr lang="en-US"/>
               <a:t>Click to edit Master title style</a:t>
             </a:r>
-            <a:endParaRPr lang="en-US"/>
           </a:p>
         </p:txBody>
       </p:sp>
@@ -273,10 +288,9 @@
           </a:lstStyle>
           <a:p>
             <a:r>
-              <a:rPr lang="en-US" smtClean="0"/>
+              <a:rPr lang="en-US"/>
               <a:t>Click to edit Master subtitle style</a:t>
             </a:r>
-            <a:endParaRPr lang="en-US"/>
           </a:p>
         </p:txBody>
       </p:sp>
@@ -297,7 +311,7 @@
           <a:p>
             <a:fld id="{5BCAD085-E8A6-8845-BD4E-CB4CCA059FC4}" type="datetimeFigureOut">
               <a:rPr lang="en-US" smtClean="0"/>
-              <a:t>1/27/13</a:t>
+              <a:t>10/13/2026</a:t>
             </a:fld>
             <a:endParaRPr lang="en-US"/>
           </a:p>
@@ -391,10 +405,9 @@
           <a:lstStyle/>
           <a:p>
             <a:r>
-              <a:rPr lang="en-US" smtClean="0"/>
+              <a:rPr lang="en-US"/>
               <a:t>Click to edit Master title style</a:t>
             </a:r>
-            <a:endParaRPr lang="en-US"/>
           </a:p>
         </p:txBody>
       </p:sp>
@@ -415,38 +428,37 @@
           <a:p>
             <a:pPr lvl="0"/>
             <a:r>
-              <a:rPr lang="en-US" smtClean="0"/>
+              <a:rPr lang="en-US"/>
               <a:t>Click to edit Master text styles</a:t>
             </a:r>
           </a:p>
           <a:p>
             <a:pPr lvl="1"/>
             <a:r>
-              <a:rPr lang="en-US" smtClean="0"/>
+              <a:rPr lang="en-US"/>
               <a:t>Second level</a:t>
             </a:r>
           </a:p>
           <a:p>
             <a:pPr lvl="2"/>
             <a:r>
-              <a:rPr lang="en-US" smtClean="0"/>
+              <a:rPr lang="en-US"/>
               <a:t>Third level</a:t>
             </a:r>
           </a:p>
           <a:p>
             <a:pPr lvl="3"/>
             <a:r>
-              <a:rPr lang="en-US" smtClean="0"/>
+              <a:rPr lang="en-US"/>
               <a:t>Fourth level</a:t>
             </a:r>
           </a:p>
           <a:p>
             <a:pPr lvl="4"/>
             <a:r>
-              <a:rPr lang="en-US" smtClean="0"/>
+              <a:rPr lang="en-US"/>
               <a:t>Fifth level</a:t>
             </a:r>
-            <a:endParaRPr lang="en-US"/>
           </a:p>
         </p:txBody>
       </p:sp>
@@ -467,7 +479,7 @@
           <a:p>
             <a:fld id="{5BCAD085-E8A6-8845-BD4E-CB4CCA059FC4}" type="datetimeFigureOut">
               <a:rPr lang="en-US" smtClean="0"/>
-              <a:t>1/27/13</a:t>
+              <a:t>10/13/2026</a:t>
             </a:fld>
             <a:endParaRPr lang="en-US"/>
           </a:p>
@@ -566,10 +578,9 @@
           <a:lstStyle/>
           <a:p>
             <a:r>
-              <a:rPr lang="en-US" smtClean="0"/>
+              <a:rPr lang="en-US"/>
               <a:t>Click to edit Master title style</a:t>
             </a:r>
-            <a:endParaRPr lang="en-US"/>
           </a:p>
         </p:txBody>
       </p:sp>
@@ -595,38 +606,37 @@
           <a:p>
             <a:pPr lvl="0"/>
             <a:r>
-              <a:rPr lang="en-US" smtClean="0"/>
+              <a:rPr lang="en-US"/>
               <a:t>Click to edit Master text styles</a:t>
             </a:r>
           </a:p>
           <a:p>
             <a:pPr lvl="1"/>
             <a:r>
-              <a:rPr lang="en-US" smtClean="0"/>
+              <a:rPr lang="en-US"/>
               <a:t>Second level</a:t>
             </a:r>
           </a:p>
           <a:p>
             <a:pPr lvl="2"/>
             <a:r>
-              <a:rPr lang="en-US" smtClean="0"/>
+              <a:rPr lang="en-US"/>
               <a:t>Third level</a:t>
             </a:r>
           </a:p>
           <a:p>
             <a:pPr lvl="3"/>
             <a:r>
-              <a:rPr lang="en-US" smtClean="0"/>
+              <a:rPr lang="en-US"/>
               <a:t>Fourth level</a:t>
             </a:r>
           </a:p>
           <a:p>
             <a:pPr lvl="4"/>
             <a:r>
-              <a:rPr lang="en-US" smtClean="0"/>
+              <a:rPr lang="en-US"/>
               <a:t>Fifth level</a:t>
             </a:r>
-            <a:endParaRPr lang="en-US"/>
           </a:p>
         </p:txBody>
       </p:sp>
@@ -647,7 +657,7 @@
           <a:p>
             <a:fld id="{5BCAD085-E8A6-8845-BD4E-CB4CCA059FC4}" type="datetimeFigureOut">
               <a:rPr lang="en-US" smtClean="0"/>
-              <a:t>1/27/13</a:t>
+              <a:t>10/13/2026</a:t>
             </a:fld>
             <a:endParaRPr lang="en-US"/>
           </a:p>
@@ -741,10 +751,9 @@
           <a:lstStyle/>
           <a:p>
             <a:r>
-              <a:rPr lang="en-US" smtClean="0"/>
+              <a:rPr lang="en-US"/>
               <a:t>Click to edit Master title style</a:t>
             </a:r>
-            <a:endParaRPr lang="en-US"/>
           </a:p>
         </p:txBody>
       </p:sp>
@@ -765,38 +774,37 @@
           <a:p>
             <a:pPr lvl="0"/>
             <a:r>
-              <a:rPr lang="en-US" smtClean="0"/>
+              <a:rPr lang="en-US"/>
               <a:t>Click to edit Master text styles</a:t>
             </a:r>
           </a:p>
           <a:p>
             <a:pPr lvl="1"/>
             <a:r>
-              <a:rPr lang="en-US" smtClean="0"/>
+              <a:rPr lang="en-US"/>
               <a:t>Second level</a:t>
             </a:r>
           </a:p>
           <a:p>
             <a:pPr lvl="2"/>
             <a:r>
-              <a:rPr lang="en-US" smtClean="0"/>
+              <a:rPr lang="en-US"/>
               <a:t>Third level</a:t>
             </a:r>
           </a:p>
           <a:p>
             <a:pPr lvl="3"/>
             <a:r>
-              <a:rPr lang="en-US" smtClean="0"/>
+              <a:rPr lang="en-US"/>
               <a:t>Fourth level</a:t>
             </a:r>
           </a:p>
           <a:p>
             <a:pPr lvl="4"/>
             <a:r>
-              <a:rPr lang="en-US" smtClean="0"/>
+              <a:rPr lang="en-US"/>
               <a:t>Fifth level</a:t>
             </a:r>
-            <a:endParaRPr lang="en-US"/>
           </a:p>
         </p:txBody>
       </p:sp>
@@ -817,7 +825,7 @@
           <a:p>
             <a:fld id="{5BCAD085-E8A6-8845-BD4E-CB4CCA059FC4}" type="datetimeFigureOut">
               <a:rPr lang="en-US" smtClean="0"/>
-              <a:t>1/27/13</a:t>
+              <a:t>10/13/2026</a:t>
             </a:fld>
             <a:endParaRPr lang="en-US"/>
           </a:p>
@@ -920,10 +928,9 @@
           </a:lstStyle>
           <a:p>
             <a:r>
-              <a:rPr lang="en-US" smtClean="0"/>
+              <a:rPr lang="en-US"/>
               <a:t>Click to edit Master title style</a:t>
             </a:r>
-            <a:endParaRPr lang="en-US"/>
           </a:p>
         </p:txBody>
       </p:sp>
@@ -1040,7 +1047,7 @@
           <a:p>
             <a:pPr lvl="0"/>
             <a:r>
-              <a:rPr lang="en-US" smtClean="0"/>
+              <a:rPr lang="en-US"/>
               <a:t>Click to edit Master text styles</a:t>
             </a:r>
           </a:p>
@@ -1063,7 +1070,7 @@
           <a:p>
             <a:fld id="{5BCAD085-E8A6-8845-BD4E-CB4CCA059FC4}" type="datetimeFigureOut">
               <a:rPr lang="en-US" smtClean="0"/>
-              <a:t>1/27/13</a:t>
+              <a:t>10/13/2026</a:t>
             </a:fld>
             <a:endParaRPr lang="en-US"/>
           </a:p>
@@ -1157,10 +1164,9 @@
           <a:lstStyle/>
           <a:p>
             <a:r>
-              <a:rPr lang="en-US" smtClean="0"/>
+              <a:rPr lang="en-US"/>
               <a:t>Click to edit Master title style</a:t>
             </a:r>
-            <a:endParaRPr lang="en-US"/>
           </a:p>
         </p:txBody>
       </p:sp>
@@ -1214,38 +1220,37 @@
           <a:p>
             <a:pPr lvl="0"/>
             <a:r>
-              <a:rPr lang="en-US" smtClean="0"/>
+              <a:rPr lang="en-US"/>
               <a:t>Click to edit Master text styles</a:t>
             </a:r>
           </a:p>
           <a:p>
             <a:pPr lvl="1"/>
             <a:r>
-              <a:rPr lang="en-US" smtClean="0"/>
+              <a:rPr lang="en-US"/>
               <a:t>Second level</a:t>
             </a:r>
           </a:p>
           <a:p>
             <a:pPr lvl="2"/>
             <a:r>
-              <a:rPr lang="en-US" smtClean="0"/>
+              <a:rPr lang="en-US"/>
               <a:t>Third level</a:t>
             </a:r>
           </a:p>
           <a:p>
             <a:pPr lvl="3"/>
             <a:r>
-              <a:rPr lang="en-US" smtClean="0"/>
+              <a:rPr lang="en-US"/>
               <a:t>Fourth level</a:t>
             </a:r>
           </a:p>
           <a:p>
             <a:pPr lvl="4"/>
             <a:r>
-              <a:rPr lang="en-US" smtClean="0"/>
+              <a:rPr lang="en-US"/>
               <a:t>Fifth level</a:t>
             </a:r>
-            <a:endParaRPr lang="en-US"/>
           </a:p>
         </p:txBody>
       </p:sp>
@@ -1299,38 +1304,37 @@
           <a:p>
             <a:pPr lvl="0"/>
             <a:r>
-              <a:rPr lang="en-US" smtClean="0"/>
+              <a:rPr lang="en-US"/>
               <a:t>Click to edit Master text styles</a:t>
             </a:r>
           </a:p>
           <a:p>
             <a:pPr lvl="1"/>
             <a:r>
-              <a:rPr lang="en-US" smtClean="0"/>
+              <a:rPr lang="en-US"/>
               <a:t>Second level</a:t>
             </a:r>
           </a:p>
           <a:p>
             <a:pPr lvl="2"/>
             <a:r>
-              <a:rPr lang="en-US" smtClean="0"/>
+              <a:rPr lang="en-US"/>
               <a:t>Third level</a:t>
             </a:r>
           </a:p>
           <a:p>
             <a:pPr lvl="3"/>
             <a:r>
-              <a:rPr lang="en-US" smtClean="0"/>
+              <a:rPr lang="en-US"/>
               <a:t>Fourth level</a:t>
             </a:r>
           </a:p>
           <a:p>
             <a:pPr lvl="4"/>
             <a:r>
-              <a:rPr lang="en-US" smtClean="0"/>
+              <a:rPr lang="en-US"/>
               <a:t>Fifth level</a:t>
             </a:r>
-            <a:endParaRPr lang="en-US"/>
           </a:p>
         </p:txBody>
       </p:sp>
@@ -1351,7 +1355,7 @@
           <a:p>
             <a:fld id="{5BCAD085-E8A6-8845-BD4E-CB4CCA059FC4}" type="datetimeFigureOut">
               <a:rPr lang="en-US" smtClean="0"/>
-              <a:t>1/27/13</a:t>
+              <a:t>10/13/2026</a:t>
             </a:fld>
             <a:endParaRPr lang="en-US"/>
           </a:p>
@@ -1449,10 +1453,9 @@
           </a:lstStyle>
           <a:p>
             <a:r>
-              <a:rPr lang="en-US" smtClean="0"/>
+              <a:rPr lang="en-US"/>
               <a:t>Click to edit Master title style</a:t>
             </a:r>
-            <a:endParaRPr lang="en-US"/>
           </a:p>
         </p:txBody>
       </p:sp>
@@ -1515,7 +1518,7 @@
           <a:p>
             <a:pPr lvl="0"/>
             <a:r>
-              <a:rPr lang="en-US" smtClean="0"/>
+              <a:rPr lang="en-US"/>
               <a:t>Click to edit Master text styles</a:t>
             </a:r>
           </a:p>
@@ -1571,38 +1574,37 @@
           <a:p>
             <a:pPr lvl="0"/>
             <a:r>
-              <a:rPr lang="en-US" smtClean="0"/>
+              <a:rPr lang="en-US"/>
               <a:t>Click to edit Master text styles</a:t>
             </a:r>
           </a:p>
           <a:p>
             <a:pPr lvl="1"/>
             <a:r>
-              <a:rPr lang="en-US" smtClean="0"/>
+              <a:rPr lang="en-US"/>
               <a:t>Second level</a:t>
             </a:r>
           </a:p>
           <a:p>
             <a:pPr lvl="2"/>
             <a:r>
-              <a:rPr lang="en-US" smtClean="0"/>
+              <a:rPr lang="en-US"/>
               <a:t>Third level</a:t>
             </a:r>
           </a:p>
           <a:p>
             <a:pPr lvl="3"/>
             <a:r>
-              <a:rPr lang="en-US" smtClean="0"/>
+              <a:rPr lang="en-US"/>
               <a:t>Fourth level</a:t>
             </a:r>
           </a:p>
           <a:p>
             <a:pPr lvl="4"/>
             <a:r>
-              <a:rPr lang="en-US" smtClean="0"/>
+              <a:rPr lang="en-US"/>
               <a:t>Fifth level</a:t>
             </a:r>
-            <a:endParaRPr lang="en-US"/>
           </a:p>
         </p:txBody>
       </p:sp>
@@ -1665,7 +1667,7 @@
           <a:p>
             <a:pPr lvl="0"/>
             <a:r>
-              <a:rPr lang="en-US" smtClean="0"/>
+              <a:rPr lang="en-US"/>
               <a:t>Click to edit Master text styles</a:t>
             </a:r>
           </a:p>
@@ -1721,38 +1723,37 @@
           <a:p>
             <a:pPr lvl="0"/>
             <a:r>
-              <a:rPr lang="en-US" smtClean="0"/>
+              <a:rPr lang="en-US"/>
               <a:t>Click to edit Master text styles</a:t>
             </a:r>
           </a:p>
           <a:p>
             <a:pPr lvl="1"/>
             <a:r>
-              <a:rPr lang="en-US" smtClean="0"/>
+              <a:rPr lang="en-US"/>
               <a:t>Second level</a:t>
             </a:r>
           </a:p>
           <a:p>
             <a:pPr lvl="2"/>
             <a:r>
-              <a:rPr lang="en-US" smtClean="0"/>
+              <a:rPr lang="en-US"/>
               <a:t>Third level</a:t>
             </a:r>
           </a:p>
           <a:p>
             <a:pPr lvl="3"/>
             <a:r>
-              <a:rPr lang="en-US" smtClean="0"/>
+              <a:rPr lang="en-US"/>
               <a:t>Fourth level</a:t>
             </a:r>
           </a:p>
           <a:p>
             <a:pPr lvl="4"/>
             <a:r>
-              <a:rPr lang="en-US" smtClean="0"/>
+              <a:rPr lang="en-US"/>
               <a:t>Fifth level</a:t>
             </a:r>
-            <a:endParaRPr lang="en-US"/>
           </a:p>
         </p:txBody>
       </p:sp>
@@ -1773,7 +1774,7 @@
           <a:p>
             <a:fld id="{5BCAD085-E8A6-8845-BD4E-CB4CCA059FC4}" type="datetimeFigureOut">
               <a:rPr lang="en-US" smtClean="0"/>
-              <a:t>1/27/13</a:t>
+              <a:t>10/13/2026</a:t>
             </a:fld>
             <a:endParaRPr lang="en-US"/>
           </a:p>
@@ -1867,10 +1868,9 @@
           <a:lstStyle/>
           <a:p>
             <a:r>
-              <a:rPr lang="en-US" smtClean="0"/>
+              <a:rPr lang="en-US"/>
               <a:t>Click to edit Master title style</a:t>
             </a:r>
-            <a:endParaRPr lang="en-US"/>
           </a:p>
         </p:txBody>
       </p:sp>
@@ -1891,7 +1891,7 @@
           <a:p>
             <a:fld id="{5BCAD085-E8A6-8845-BD4E-CB4CCA059FC4}" type="datetimeFigureOut">
               <a:rPr lang="en-US" smtClean="0"/>
-              <a:t>1/27/13</a:t>
+              <a:t>10/13/2026</a:t>
             </a:fld>
             <a:endParaRPr lang="en-US"/>
           </a:p>
@@ -1986,7 +1986,7 @@
           <a:p>
             <a:fld id="{5BCAD085-E8A6-8845-BD4E-CB4CCA059FC4}" type="datetimeFigureOut">
               <a:rPr lang="en-US" smtClean="0"/>
-              <a:t>1/27/13</a:t>
+              <a:t>10/13/2026</a:t>
             </a:fld>
             <a:endParaRPr lang="en-US"/>
           </a:p>
@@ -2089,10 +2089,9 @@
           </a:lstStyle>
           <a:p>
             <a:r>
-              <a:rPr lang="en-US" smtClean="0"/>
+              <a:rPr lang="en-US"/>
               <a:t>Click to edit Master title style</a:t>
             </a:r>
-            <a:endParaRPr lang="en-US"/>
           </a:p>
         </p:txBody>
       </p:sp>
@@ -2146,38 +2145,37 @@
           <a:p>
             <a:pPr lvl="0"/>
             <a:r>
-              <a:rPr lang="en-US" smtClean="0"/>
+              <a:rPr lang="en-US"/>
               <a:t>Click to edit Master text styles</a:t>
             </a:r>
           </a:p>
           <a:p>
             <a:pPr lvl="1"/>
             <a:r>
-              <a:rPr lang="en-US" smtClean="0"/>
+              <a:rPr lang="en-US"/>
               <a:t>Second level</a:t>
             </a:r>
           </a:p>
           <a:p>
             <a:pPr lvl="2"/>
             <a:r>
-              <a:rPr lang="en-US" smtClean="0"/>
+              <a:rPr lang="en-US"/>
               <a:t>Third level</a:t>
             </a:r>
           </a:p>
           <a:p>
             <a:pPr lvl="3"/>
             <a:r>
-              <a:rPr lang="en-US" smtClean="0"/>
+              <a:rPr lang="en-US"/>
               <a:t>Fourth level</a:t>
             </a:r>
           </a:p>
           <a:p>
             <a:pPr lvl="4"/>
             <a:r>
-              <a:rPr lang="en-US" smtClean="0"/>
+              <a:rPr lang="en-US"/>
               <a:t>Fifth level</a:t>
             </a:r>
-            <a:endParaRPr lang="en-US"/>
           </a:p>
         </p:txBody>
       </p:sp>
@@ -2240,7 +2238,7 @@
           <a:p>
             <a:pPr lvl="0"/>
             <a:r>
-              <a:rPr lang="en-US" smtClean="0"/>
+              <a:rPr lang="en-US"/>
               <a:t>Click to edit Master text styles</a:t>
             </a:r>
           </a:p>
@@ -2263,7 +2261,7 @@
           <a:p>
             <a:fld id="{5BCAD085-E8A6-8845-BD4E-CB4CCA059FC4}" type="datetimeFigureOut">
               <a:rPr lang="en-US" smtClean="0"/>
-              <a:t>1/27/13</a:t>
+              <a:t>10/13/2026</a:t>
             </a:fld>
             <a:endParaRPr lang="en-US"/>
           </a:p>
@@ -2366,10 +2364,9 @@
           </a:lstStyle>
           <a:p>
             <a:r>
-              <a:rPr lang="en-US" smtClean="0"/>
+              <a:rPr lang="en-US"/>
               <a:t>Click to edit Master title style</a:t>
             </a:r>
-            <a:endParaRPr lang="en-US"/>
           </a:p>
         </p:txBody>
       </p:sp>
@@ -2493,7 +2490,7 @@
           <a:p>
             <a:pPr lvl="0"/>
             <a:r>
-              <a:rPr lang="en-US" smtClean="0"/>
+              <a:rPr lang="en-US"/>
               <a:t>Click to edit Master text styles</a:t>
             </a:r>
           </a:p>
@@ -2516,7 +2513,7 @@
           <a:p>
             <a:fld id="{5BCAD085-E8A6-8845-BD4E-CB4CCA059FC4}" type="datetimeFigureOut">
               <a:rPr lang="en-US" smtClean="0"/>
-              <a:t>1/27/13</a:t>
+              <a:t>10/13/2026</a:t>
             </a:fld>
             <a:endParaRPr lang="en-US"/>
           </a:p>
@@ -2625,10 +2622,9 @@
           <a:lstStyle/>
           <a:p>
             <a:r>
-              <a:rPr lang="en-US" smtClean="0"/>
+              <a:rPr lang="en-US"/>
               <a:t>Click to edit Master title style</a:t>
             </a:r>
-            <a:endParaRPr lang="en-US"/>
           </a:p>
         </p:txBody>
       </p:sp>
@@ -2659,38 +2655,37 @@
           <a:p>
             <a:pPr lvl="0"/>
             <a:r>
-              <a:rPr lang="en-US" smtClean="0"/>
+              <a:rPr lang="en-US"/>
               <a:t>Click to edit Master text styles</a:t>
             </a:r>
           </a:p>
           <a:p>
             <a:pPr lvl="1"/>
             <a:r>
-              <a:rPr lang="en-US" smtClean="0"/>
+              <a:rPr lang="en-US"/>
               <a:t>Second level</a:t>
             </a:r>
           </a:p>
           <a:p>
             <a:pPr lvl="2"/>
             <a:r>
-              <a:rPr lang="en-US" smtClean="0"/>
+              <a:rPr lang="en-US"/>
               <a:t>Third level</a:t>
             </a:r>
           </a:p>
           <a:p>
             <a:pPr lvl="3"/>
             <a:r>
-              <a:rPr lang="en-US" smtClean="0"/>
+              <a:rPr lang="en-US"/>
               <a:t>Fourth level</a:t>
             </a:r>
           </a:p>
           <a:p>
             <a:pPr lvl="4"/>
             <a:r>
-              <a:rPr lang="en-US" smtClean="0"/>
+              <a:rPr lang="en-US"/>
               <a:t>Fifth level</a:t>
             </a:r>
-            <a:endParaRPr lang="en-US"/>
           </a:p>
         </p:txBody>
       </p:sp>
@@ -2729,7 +2724,7 @@
           <a:p>
             <a:fld id="{5BCAD085-E8A6-8845-BD4E-CB4CCA059FC4}" type="datetimeFigureOut">
               <a:rPr lang="en-US" smtClean="0"/>
-              <a:t>1/27/13</a:t>
+              <a:t>10/13/2026</a:t>
             </a:fld>
             <a:endParaRPr lang="en-US"/>
           </a:p>
@@ -3088,7 +3083,7 @@
 </file>
 
 <file path=ppt/slides/slide1.xml><?xml version="1.0" encoding="utf-8"?>
-<p:sld xmlns:a="http://schemas.openxmlformats.org/drawingml/2006/main" xmlns:p="http://schemas.openxmlformats.org/presentationml/2006/main" xmlns:r="http://schemas.openxmlformats.org/officeDocument/2006/relationships">
+<p:sld xmlns:a="http://schemas.openxmlformats.org/drawingml/2006/main" xmlns:r="http://schemas.openxmlformats.org/officeDocument/2006/relationships" xmlns:p="http://schemas.openxmlformats.org/presentationml/2006/main">
   <p:cSld>
     <p:spTree>
       <p:nvGrpSpPr>
@@ -3096,7 +3091,14 @@
         <p:cNvGrpSpPr/>
         <p:nvPr/>
       </p:nvGrpSpPr>
-      <p:grpSpPr/>
+      <p:grpSpPr>
+        <a:xfrm>
+          <a:off x="0" y="0"/>
+          <a:ext cx="0" cy="0"/>
+          <a:chOff x="0" y="0"/>
+          <a:chExt cx="0" cy="0"/>
+        </a:xfrm>
+      </p:grpSpPr>
       <p:sp>
         <p:nvSpPr>
           <p:cNvPr id="2" name="Rectangle 1"/>
@@ -3105,7 +3107,7 @@
         </p:nvSpPr>
         <p:spPr>
           <a:xfrm>
-            <a:off x="0" y="0"/>
+            <a:off x="25401" y="16934"/>
             <a:ext cx="12191695" cy="6858000"/>
           </a:xfrm>
           <a:prstGeom prst="rect">
@@ -3137,6 +3139,7 @@
           <a:lstStyle/>
           <a:p>
             <a:pPr algn="ctr"/>
+            <a:endParaRPr/>
           </a:p>
         </p:txBody>
       </p:sp>
@@ -3180,6 +3183,7 @@
           <a:lstStyle/>
           <a:p>
             <a:pPr algn="ctr"/>
+            <a:endParaRPr/>
           </a:p>
         </p:txBody>
       </p:sp>
@@ -3277,6 +3281,7 @@
           <a:lstStyle/>
           <a:p>
             <a:pPr algn="ctr"/>
+            <a:endParaRPr/>
           </a:p>
         </p:txBody>
       </p:sp>
@@ -3393,7 +3398,7 @@
 </file>
 
 <file path=ppt/slides/slide10.xml><?xml version="1.0" encoding="utf-8"?>
-<p:sld xmlns:a="http://schemas.openxmlformats.org/drawingml/2006/main" xmlns:p="http://schemas.openxmlformats.org/presentationml/2006/main" xmlns:r="http://schemas.openxmlformats.org/officeDocument/2006/relationships">
+<p:sld xmlns:a="http://schemas.openxmlformats.org/drawingml/2006/main" xmlns:r="http://schemas.openxmlformats.org/officeDocument/2006/relationships" xmlns:p="http://schemas.openxmlformats.org/presentationml/2006/main">
   <p:cSld>
     <p:spTree>
       <p:nvGrpSpPr>
@@ -3401,7 +3406,14 @@
         <p:cNvGrpSpPr/>
         <p:nvPr/>
       </p:nvGrpSpPr>
-      <p:grpSpPr/>
+      <p:grpSpPr>
+        <a:xfrm>
+          <a:off x="0" y="0"/>
+          <a:ext cx="0" cy="0"/>
+          <a:chOff x="0" y="0"/>
+          <a:chExt cx="0" cy="0"/>
+        </a:xfrm>
+      </p:grpSpPr>
       <p:sp>
         <p:nvSpPr>
           <p:cNvPr id="2" name="Rectangle 1"/>
@@ -3442,6 +3454,7 @@
           <a:lstStyle/>
           <a:p>
             <a:pPr algn="ctr"/>
+            <a:endParaRPr/>
           </a:p>
         </p:txBody>
       </p:sp>
@@ -3595,6 +3608,7 @@
           <a:lstStyle/>
           <a:p>
             <a:pPr algn="ctr"/>
+            <a:endParaRPr/>
           </a:p>
         </p:txBody>
       </p:sp>
@@ -3856,6 +3870,7 @@
           <a:lstStyle/>
           <a:p>
             <a:pPr algn="ctr"/>
+            <a:endParaRPr/>
           </a:p>
         </p:txBody>
       </p:sp>
@@ -4068,7 +4083,7 @@
 </file>
 
 <file path=ppt/slides/slide2.xml><?xml version="1.0" encoding="utf-8"?>
-<p:sld xmlns:a="http://schemas.openxmlformats.org/drawingml/2006/main" xmlns:p="http://schemas.openxmlformats.org/presentationml/2006/main" xmlns:r="http://schemas.openxmlformats.org/officeDocument/2006/relationships">
+<p:sld xmlns:a="http://schemas.openxmlformats.org/drawingml/2006/main" xmlns:r="http://schemas.openxmlformats.org/officeDocument/2006/relationships" xmlns:p="http://schemas.openxmlformats.org/presentationml/2006/main">
   <p:cSld>
     <p:spTree>
       <p:nvGrpSpPr>
@@ -4076,7 +4091,14 @@
         <p:cNvGrpSpPr/>
         <p:nvPr/>
       </p:nvGrpSpPr>
-      <p:grpSpPr/>
+      <p:grpSpPr>
+        <a:xfrm>
+          <a:off x="0" y="0"/>
+          <a:ext cx="0" cy="0"/>
+          <a:chOff x="0" y="0"/>
+          <a:chExt cx="0" cy="0"/>
+        </a:xfrm>
+      </p:grpSpPr>
       <p:sp>
         <p:nvSpPr>
           <p:cNvPr id="2" name="Rectangle 1"/>
@@ -4117,6 +4139,7 @@
           <a:lstStyle/>
           <a:p>
             <a:pPr algn="ctr"/>
+            <a:endParaRPr/>
           </a:p>
         </p:txBody>
       </p:sp>
@@ -4270,6 +4293,7 @@
           <a:lstStyle/>
           <a:p>
             <a:pPr algn="ctr"/>
+            <a:endParaRPr/>
           </a:p>
         </p:txBody>
       </p:sp>
@@ -4467,6 +4491,7 @@
           <a:lstStyle/>
           <a:p>
             <a:pPr algn="ctr"/>
+            <a:endParaRPr/>
           </a:p>
         </p:txBody>
       </p:sp>
@@ -4648,6 +4673,7 @@
           <a:lstStyle/>
           <a:p>
             <a:pPr algn="ctr"/>
+            <a:endParaRPr/>
           </a:p>
         </p:txBody>
       </p:sp>
@@ -4796,7 +4822,7 @@
 </file>
 
 <file path=ppt/slides/slide3.xml><?xml version="1.0" encoding="utf-8"?>
-<p:sld xmlns:a="http://schemas.openxmlformats.org/drawingml/2006/main" xmlns:p="http://schemas.openxmlformats.org/presentationml/2006/main" xmlns:r="http://schemas.openxmlformats.org/officeDocument/2006/relationships">
+<p:sld xmlns:a="http://schemas.openxmlformats.org/drawingml/2006/main" xmlns:r="http://schemas.openxmlformats.org/officeDocument/2006/relationships" xmlns:p="http://schemas.openxmlformats.org/presentationml/2006/main">
   <p:cSld>
     <p:spTree>
       <p:nvGrpSpPr>
@@ -4804,7 +4830,14 @@
         <p:cNvGrpSpPr/>
         <p:nvPr/>
       </p:nvGrpSpPr>
-      <p:grpSpPr/>
+      <p:grpSpPr>
+        <a:xfrm>
+          <a:off x="0" y="0"/>
+          <a:ext cx="0" cy="0"/>
+          <a:chOff x="0" y="0"/>
+          <a:chExt cx="0" cy="0"/>
+        </a:xfrm>
+      </p:grpSpPr>
       <p:sp>
         <p:nvSpPr>
           <p:cNvPr id="2" name="Rectangle 1"/>
@@ -4813,7 +4846,7 @@
         </p:nvSpPr>
         <p:spPr>
           <a:xfrm>
-            <a:off x="0" y="0"/>
+            <a:off x="0" y="8467"/>
             <a:ext cx="12191695" cy="6858000"/>
           </a:xfrm>
           <a:prstGeom prst="rect">
@@ -4845,6 +4878,7 @@
           <a:lstStyle/>
           <a:p>
             <a:pPr algn="ctr"/>
+            <a:endParaRPr/>
           </a:p>
         </p:txBody>
       </p:sp>
@@ -4962,11 +4996,17 @@
           <p:cNvGraphicFramePr>
             <a:graphicFrameLocks noGrp="1"/>
           </p:cNvGraphicFramePr>
-          <p:nvPr/>
+          <p:nvPr>
+            <p:extLst>
+              <p:ext uri="{D42A27DB-BD31-4B8C-83A1-F6EECF244321}">
+                <p14:modId xmlns:p14="http://schemas.microsoft.com/office/powerpoint/2010/main" val="2281592127"/>
+              </p:ext>
+            </p:extLst>
+          </p:nvPr>
         </p:nvGraphicFramePr>
         <p:xfrm>
           <a:off x="731520" y="1737360"/>
-          <a:ext cx="10725912" cy="4389120"/>
+          <a:ext cx="9707880" cy="4748860"/>
         </p:xfrm>
         <a:graphic>
           <a:graphicData uri="http://schemas.openxmlformats.org/drawingml/2006/table">
@@ -4975,12 +5015,36 @@
                 <a:tableStyleId>{5C22544A-7EE6-4342-B048-85BDC9FD1C3A}</a:tableStyleId>
               </a:tblPr>
               <a:tblGrid>
-                <a:gridCol w="2560320"/>
-                <a:gridCol w="1280160"/>
-                <a:gridCol w="4114800"/>
-                <a:gridCol w="2770632"/>
+                <a:gridCol w="2317312">
+                  <a:extLst>
+                    <a:ext uri="{9D8B030D-6E8A-4147-A177-3AD203B41FA5}">
+                      <a16:colId xmlns:a16="http://schemas.microsoft.com/office/drawing/2014/main" val="20000"/>
+                    </a:ext>
+                  </a:extLst>
+                </a:gridCol>
+                <a:gridCol w="1158655">
+                  <a:extLst>
+                    <a:ext uri="{9D8B030D-6E8A-4147-A177-3AD203B41FA5}">
+                      <a16:colId xmlns:a16="http://schemas.microsoft.com/office/drawing/2014/main" val="20001"/>
+                    </a:ext>
+                  </a:extLst>
+                </a:gridCol>
+                <a:gridCol w="3724251">
+                  <a:extLst>
+                    <a:ext uri="{9D8B030D-6E8A-4147-A177-3AD203B41FA5}">
+                      <a16:colId xmlns:a16="http://schemas.microsoft.com/office/drawing/2014/main" val="20002"/>
+                    </a:ext>
+                  </a:extLst>
+                </a:gridCol>
+                <a:gridCol w="2507662">
+                  <a:extLst>
+                    <a:ext uri="{9D8B030D-6E8A-4147-A177-3AD203B41FA5}">
+                      <a16:colId xmlns:a16="http://schemas.microsoft.com/office/drawing/2014/main" val="20003"/>
+                    </a:ext>
+                  </a:extLst>
+                </a:gridCol>
               </a:tblGrid>
-              <a:tr h="548640">
+              <a:tr h="474886">
                 <a:tc>
                   <a:txBody>
                     <a:bodyPr/>
@@ -5077,8 +5141,13 @@
                     </a:solidFill>
                   </a:tcPr>
                 </a:tc>
+                <a:extLst>
+                  <a:ext uri="{0D108BD9-81ED-4DB2-BD59-A6C34878D82A}">
+                    <a16:rowId xmlns:a16="http://schemas.microsoft.com/office/drawing/2014/main" val="10000"/>
+                  </a:ext>
+                </a:extLst>
               </a:tr>
-              <a:tr h="548640">
+              <a:tr h="474886">
                 <a:tc>
                   <a:txBody>
                     <a:bodyPr/>
@@ -5175,8 +5244,13 @@
                     </a:solidFill>
                   </a:tcPr>
                 </a:tc>
+                <a:extLst>
+                  <a:ext uri="{0D108BD9-81ED-4DB2-BD59-A6C34878D82A}">
+                    <a16:rowId xmlns:a16="http://schemas.microsoft.com/office/drawing/2014/main" val="10001"/>
+                  </a:ext>
+                </a:extLst>
               </a:tr>
-              <a:tr h="548640">
+              <a:tr h="474886">
                 <a:tc>
                   <a:txBody>
                     <a:bodyPr/>
@@ -5273,8 +5347,13 @@
                     </a:solidFill>
                   </a:tcPr>
                 </a:tc>
+                <a:extLst>
+                  <a:ext uri="{0D108BD9-81ED-4DB2-BD59-A6C34878D82A}">
+                    <a16:rowId xmlns:a16="http://schemas.microsoft.com/office/drawing/2014/main" val="10002"/>
+                  </a:ext>
+                </a:extLst>
               </a:tr>
-              <a:tr h="548640">
+              <a:tr h="474886">
                 <a:tc>
                   <a:txBody>
                     <a:bodyPr/>
@@ -5361,7 +5440,16 @@
                         </a:defRPr>
                       </a:pPr>
                       <a:r>
-                        <a:t>MongoDB Atlas (clusterdb.users)</a:t>
+                        <a:rPr dirty="0"/>
+                        <a:t>MongoDB Atlas (</a:t>
+                      </a:r>
+                      <a:r>
+                        <a:rPr dirty="0" err="1"/>
+                        <a:t>clusterdb.users</a:t>
+                      </a:r>
+                      <a:r>
+                        <a:rPr dirty="0"/>
+                        <a:t>)</a:t>
                       </a:r>
                     </a:p>
                   </a:txBody>
@@ -5371,8 +5459,13 @@
                     </a:solidFill>
                   </a:tcPr>
                 </a:tc>
+                <a:extLst>
+                  <a:ext uri="{0D108BD9-81ED-4DB2-BD59-A6C34878D82A}">
+                    <a16:rowId xmlns:a16="http://schemas.microsoft.com/office/drawing/2014/main" val="10003"/>
+                  </a:ext>
+                </a:extLst>
               </a:tr>
-              <a:tr h="548640">
+              <a:tr h="474886">
                 <a:tc>
                   <a:txBody>
                     <a:bodyPr/>
@@ -5459,7 +5552,16 @@
                         </a:defRPr>
                       </a:pPr>
                       <a:r>
-                        <a:t>MongoDB Atlas (clusterdb.rooms)</a:t>
+                        <a:rPr dirty="0"/>
+                        <a:t>MongoDB Atlas (</a:t>
+                      </a:r>
+                      <a:r>
+                        <a:rPr dirty="0" err="1"/>
+                        <a:t>clusterdb.rooms</a:t>
+                      </a:r>
+                      <a:r>
+                        <a:rPr dirty="0"/>
+                        <a:t>)</a:t>
                       </a:r>
                     </a:p>
                   </a:txBody>
@@ -5469,8 +5571,13 @@
                     </a:solidFill>
                   </a:tcPr>
                 </a:tc>
+                <a:extLst>
+                  <a:ext uri="{0D108BD9-81ED-4DB2-BD59-A6C34878D82A}">
+                    <a16:rowId xmlns:a16="http://schemas.microsoft.com/office/drawing/2014/main" val="10004"/>
+                  </a:ext>
+                </a:extLst>
               </a:tr>
-              <a:tr h="548640">
+              <a:tr h="474886">
                 <a:tc>
                   <a:txBody>
                     <a:bodyPr/>
@@ -5557,7 +5664,16 @@
                         </a:defRPr>
                       </a:pPr>
                       <a:r>
-                        <a:t>MongoDB Atlas (clusterdb.permissions)</a:t>
+                        <a:rPr dirty="0"/>
+                        <a:t>MongoDB Atlas (</a:t>
+                      </a:r>
+                      <a:r>
+                        <a:rPr dirty="0" err="1"/>
+                        <a:t>clusterdb.permissions</a:t>
+                      </a:r>
+                      <a:r>
+                        <a:rPr dirty="0"/>
+                        <a:t>)</a:t>
                       </a:r>
                     </a:p>
                   </a:txBody>
@@ -5567,8 +5683,13 @@
                     </a:solidFill>
                   </a:tcPr>
                 </a:tc>
+                <a:extLst>
+                  <a:ext uri="{0D108BD9-81ED-4DB2-BD59-A6C34878D82A}">
+                    <a16:rowId xmlns:a16="http://schemas.microsoft.com/office/drawing/2014/main" val="10005"/>
+                  </a:ext>
+                </a:extLst>
               </a:tr>
-              <a:tr h="548640">
+              <a:tr h="474886">
                 <a:tc>
                   <a:txBody>
                     <a:bodyPr/>
@@ -5665,8 +5786,13 @@
                     </a:solidFill>
                   </a:tcPr>
                 </a:tc>
+                <a:extLst>
+                  <a:ext uri="{0D108BD9-81ED-4DB2-BD59-A6C34878D82A}">
+                    <a16:rowId xmlns:a16="http://schemas.microsoft.com/office/drawing/2014/main" val="10006"/>
+                  </a:ext>
+                </a:extLst>
               </a:tr>
-              <a:tr h="548640">
+              <a:tr h="474886">
                 <a:tc>
                   <a:txBody>
                     <a:bodyPr/>
@@ -5681,6 +5807,7 @@
                         </a:defRPr>
                       </a:pPr>
                       <a:r>
+                        <a:rPr dirty="0"/>
                         <a:t>AccessLog-Instance-2</a:t>
                       </a:r>
                     </a:p>
@@ -5753,7 +5880,16 @@
                         </a:defRPr>
                       </a:pPr>
                       <a:r>
-                        <a:t>MongoDB Atlas (clusterdb.accesslogs)</a:t>
+                        <a:rPr dirty="0"/>
+                        <a:t>MongoDB Atlas (</a:t>
+                      </a:r>
+                      <a:r>
+                        <a:rPr dirty="0" err="1"/>
+                        <a:t>clusterdb.accesslogs</a:t>
+                      </a:r>
+                      <a:r>
+                        <a:rPr dirty="0"/>
+                        <a:t>)</a:t>
                       </a:r>
                     </a:p>
                   </a:txBody>
@@ -5763,6 +5899,310 @@
                     </a:solidFill>
                   </a:tcPr>
                 </a:tc>
+                <a:extLst>
+                  <a:ext uri="{0D108BD9-81ED-4DB2-BD59-A6C34878D82A}">
+                    <a16:rowId xmlns:a16="http://schemas.microsoft.com/office/drawing/2014/main" val="10007"/>
+                  </a:ext>
+                </a:extLst>
+              </a:tr>
+              <a:tr h="474886">
+                <a:tc>
+                  <a:txBody>
+                    <a:bodyPr/>
+                    <a:lstStyle/>
+                    <a:p>
+                      <a:pPr>
+                        <a:defRPr sz="1050">
+                          <a:solidFill>
+                            <a:srgbClr val="F8FAFC"/>
+                          </a:solidFill>
+                          <a:latin typeface="Arial"/>
+                        </a:defRPr>
+                      </a:pPr>
+                      <a:r>
+                        <a:rPr lang="en-US" dirty="0"/>
+                        <a:t>Student Service</a:t>
+                      </a:r>
+                      <a:endParaRPr dirty="0"/>
+                    </a:p>
+                  </a:txBody>
+                  <a:tcPr>
+                    <a:solidFill>
+                      <a:srgbClr val="1E293B"/>
+                    </a:solidFill>
+                  </a:tcPr>
+                </a:tc>
+                <a:tc>
+                  <a:txBody>
+                    <a:bodyPr/>
+                    <a:lstStyle/>
+                    <a:p>
+                      <a:pPr>
+                        <a:defRPr sz="1050">
+                          <a:solidFill>
+                            <a:srgbClr val="94A3B8"/>
+                          </a:solidFill>
+                          <a:latin typeface="Arial"/>
+                        </a:defRPr>
+                      </a:pPr>
+                      <a:r>
+                        <a:rPr lang="en-US" dirty="0"/>
+                        <a:t>5007</a:t>
+                      </a:r>
+                      <a:endParaRPr dirty="0"/>
+                    </a:p>
+                  </a:txBody>
+                  <a:tcPr>
+                    <a:solidFill>
+                      <a:srgbClr val="1E293B"/>
+                    </a:solidFill>
+                  </a:tcPr>
+                </a:tc>
+                <a:tc>
+                  <a:txBody>
+                    <a:bodyPr/>
+                    <a:lstStyle/>
+                    <a:p>
+                      <a:pPr>
+                        <a:defRPr sz="1050">
+                          <a:solidFill>
+                            <a:srgbClr val="94A3B8"/>
+                          </a:solidFill>
+                          <a:latin typeface="Arial"/>
+                        </a:defRPr>
+                      </a:pPr>
+                      <a:r>
+                        <a:rPr lang="en-US" dirty="0"/>
+                        <a:t>Update Profile, View Profile, room schedule</a:t>
+                      </a:r>
+                      <a:endParaRPr dirty="0"/>
+                    </a:p>
+                  </a:txBody>
+                  <a:tcPr>
+                    <a:solidFill>
+                      <a:srgbClr val="1E293B"/>
+                    </a:solidFill>
+                  </a:tcPr>
+                </a:tc>
+                <a:tc>
+                  <a:txBody>
+                    <a:bodyPr/>
+                    <a:lstStyle/>
+                    <a:p>
+                      <a:pPr marL="0" marR="0" lvl="0" indent="0" algn="l" defTabSz="457200" rtl="0" eaLnBrk="1" fontAlgn="auto" latinLnBrk="0" hangingPunct="1">
+                        <a:lnSpc>
+                          <a:spcPct val="100000"/>
+                        </a:lnSpc>
+                        <a:spcBef>
+                          <a:spcPts val="0"/>
+                        </a:spcBef>
+                        <a:spcAft>
+                          <a:spcPts val="0"/>
+                        </a:spcAft>
+                        <a:buClrTx/>
+                        <a:buSzTx/>
+                        <a:buFontTx/>
+                        <a:buNone/>
+                        <a:tabLst/>
+                        <a:defRPr sz="1050">
+                          <a:solidFill>
+                            <a:srgbClr val="94A3B8"/>
+                          </a:solidFill>
+                          <a:latin typeface="Arial"/>
+                        </a:defRPr>
+                      </a:pPr>
+                      <a:r>
+                        <a:rPr lang="en-US" dirty="0"/>
+                        <a:t>MongoDB Atlas (</a:t>
+                      </a:r>
+                      <a:r>
+                        <a:rPr lang="en-US" dirty="0" err="1"/>
+                        <a:t>clusterdb.users</a:t>
+                      </a:r>
+                      <a:r>
+                        <a:rPr lang="en-US" dirty="0"/>
+                        <a:t>)</a:t>
+                      </a:r>
+                    </a:p>
+                    <a:p>
+                      <a:pPr>
+                        <a:defRPr sz="1050">
+                          <a:solidFill>
+                            <a:srgbClr val="94A3B8"/>
+                          </a:solidFill>
+                          <a:latin typeface="Arial"/>
+                        </a:defRPr>
+                      </a:pPr>
+                      <a:endParaRPr dirty="0"/>
+                    </a:p>
+                  </a:txBody>
+                  <a:tcPr>
+                    <a:solidFill>
+                      <a:srgbClr val="1E293B"/>
+                    </a:solidFill>
+                  </a:tcPr>
+                </a:tc>
+                <a:extLst>
+                  <a:ext uri="{0D108BD9-81ED-4DB2-BD59-A6C34878D82A}">
+                    <a16:rowId xmlns:a16="http://schemas.microsoft.com/office/drawing/2014/main" val="3377653039"/>
+                  </a:ext>
+                </a:extLst>
+              </a:tr>
+              <a:tr h="474886">
+                <a:tc>
+                  <a:txBody>
+                    <a:bodyPr/>
+                    <a:lstStyle/>
+                    <a:p>
+                      <a:pPr>
+                        <a:defRPr sz="1050">
+                          <a:solidFill>
+                            <a:srgbClr val="F8FAFC"/>
+                          </a:solidFill>
+                          <a:latin typeface="Arial"/>
+                        </a:defRPr>
+                      </a:pPr>
+                      <a:r>
+                        <a:rPr lang="en-US" dirty="0"/>
+                        <a:t>Teacher Service</a:t>
+                      </a:r>
+                      <a:endParaRPr dirty="0"/>
+                    </a:p>
+                  </a:txBody>
+                  <a:tcPr>
+                    <a:solidFill>
+                      <a:srgbClr val="1E293B"/>
+                    </a:solidFill>
+                  </a:tcPr>
+                </a:tc>
+                <a:tc>
+                  <a:txBody>
+                    <a:bodyPr/>
+                    <a:lstStyle/>
+                    <a:p>
+                      <a:pPr>
+                        <a:defRPr sz="1050">
+                          <a:solidFill>
+                            <a:srgbClr val="94A3B8"/>
+                          </a:solidFill>
+                          <a:latin typeface="Arial"/>
+                        </a:defRPr>
+                      </a:pPr>
+                      <a:r>
+                        <a:rPr lang="en-US" dirty="0"/>
+                        <a:t>5008</a:t>
+                      </a:r>
+                      <a:endParaRPr dirty="0"/>
+                    </a:p>
+                  </a:txBody>
+                  <a:tcPr>
+                    <a:solidFill>
+                      <a:srgbClr val="1E293B"/>
+                    </a:solidFill>
+                  </a:tcPr>
+                </a:tc>
+                <a:tc>
+                  <a:txBody>
+                    <a:bodyPr/>
+                    <a:lstStyle/>
+                    <a:p>
+                      <a:pPr marL="0" marR="0" lvl="0" indent="0" algn="l" defTabSz="457200" rtl="0" eaLnBrk="1" fontAlgn="auto" latinLnBrk="0" hangingPunct="1">
+                        <a:lnSpc>
+                          <a:spcPct val="100000"/>
+                        </a:lnSpc>
+                        <a:spcBef>
+                          <a:spcPts val="0"/>
+                        </a:spcBef>
+                        <a:spcAft>
+                          <a:spcPts val="0"/>
+                        </a:spcAft>
+                        <a:buClrTx/>
+                        <a:buSzTx/>
+                        <a:buFontTx/>
+                        <a:buNone/>
+                        <a:tabLst/>
+                        <a:defRPr sz="1050">
+                          <a:solidFill>
+                            <a:srgbClr val="94A3B8"/>
+                          </a:solidFill>
+                          <a:latin typeface="Arial"/>
+                        </a:defRPr>
+                      </a:pPr>
+                      <a:r>
+                        <a:rPr lang="en-US" dirty="0"/>
+                        <a:t>Update Profile, View Profile, room schedule</a:t>
+                      </a:r>
+                    </a:p>
+                  </a:txBody>
+                  <a:tcPr>
+                    <a:solidFill>
+                      <a:srgbClr val="1E293B"/>
+                    </a:solidFill>
+                  </a:tcPr>
+                </a:tc>
+                <a:tc>
+                  <a:txBody>
+                    <a:bodyPr/>
+                    <a:lstStyle/>
+                    <a:p>
+                      <a:pPr marL="0" marR="0" lvl="0" indent="0" algn="l" defTabSz="457200" rtl="0" eaLnBrk="1" fontAlgn="auto" latinLnBrk="0" hangingPunct="1">
+                        <a:lnSpc>
+                          <a:spcPct val="100000"/>
+                        </a:lnSpc>
+                        <a:spcBef>
+                          <a:spcPts val="0"/>
+                        </a:spcBef>
+                        <a:spcAft>
+                          <a:spcPts val="0"/>
+                        </a:spcAft>
+                        <a:buClrTx/>
+                        <a:buSzTx/>
+                        <a:buFontTx/>
+                        <a:buNone/>
+                        <a:tabLst/>
+                        <a:defRPr sz="1050">
+                          <a:solidFill>
+                            <a:srgbClr val="94A3B8"/>
+                          </a:solidFill>
+                          <a:latin typeface="Arial"/>
+                        </a:defRPr>
+                      </a:pPr>
+                      <a:r>
+                        <a:rPr lang="en-US" dirty="0"/>
+                        <a:t>MongoDB Atlas (</a:t>
+                      </a:r>
+                      <a:r>
+                        <a:rPr lang="en-US" dirty="0" err="1"/>
+                        <a:t>clusterdb.users</a:t>
+                      </a:r>
+                      <a:r>
+                        <a:rPr lang="en-US" dirty="0"/>
+                        <a:t>)</a:t>
+                      </a:r>
+                    </a:p>
+                    <a:p>
+                      <a:pPr>
+                        <a:defRPr sz="1050">
+                          <a:solidFill>
+                            <a:srgbClr val="94A3B8"/>
+                          </a:solidFill>
+                          <a:latin typeface="Arial"/>
+                        </a:defRPr>
+                      </a:pPr>
+                      <a:endParaRPr dirty="0"/>
+                    </a:p>
+                  </a:txBody>
+                  <a:tcPr>
+                    <a:solidFill>
+                      <a:srgbClr val="1E293B"/>
+                    </a:solidFill>
+                  </a:tcPr>
+                </a:tc>
+                <a:extLst>
+                  <a:ext uri="{0D108BD9-81ED-4DB2-BD59-A6C34878D82A}">
+                    <a16:rowId xmlns:a16="http://schemas.microsoft.com/office/drawing/2014/main" val="3302711818"/>
+                  </a:ext>
+                </a:extLst>
               </a:tr>
             </a:tbl>
           </a:graphicData>
@@ -5777,7 +6217,7 @@
 </file>
 
 <file path=ppt/slides/slide4.xml><?xml version="1.0" encoding="utf-8"?>
-<p:sld xmlns:a="http://schemas.openxmlformats.org/drawingml/2006/main" xmlns:p="http://schemas.openxmlformats.org/presentationml/2006/main" xmlns:r="http://schemas.openxmlformats.org/officeDocument/2006/relationships">
+<p:sld xmlns:a="http://schemas.openxmlformats.org/drawingml/2006/main" xmlns:r="http://schemas.openxmlformats.org/officeDocument/2006/relationships" xmlns:p="http://schemas.openxmlformats.org/presentationml/2006/main">
   <p:cSld>
     <p:spTree>
       <p:nvGrpSpPr>
@@ -5785,7 +6225,14 @@
         <p:cNvGrpSpPr/>
         <p:nvPr/>
       </p:nvGrpSpPr>
-      <p:grpSpPr/>
+      <p:grpSpPr>
+        <a:xfrm>
+          <a:off x="0" y="0"/>
+          <a:ext cx="0" cy="0"/>
+          <a:chOff x="0" y="0"/>
+          <a:chExt cx="0" cy="0"/>
+        </a:xfrm>
+      </p:grpSpPr>
       <p:sp>
         <p:nvSpPr>
           <p:cNvPr id="2" name="Rectangle 1"/>
@@ -5826,6 +6273,7 @@
           <a:lstStyle/>
           <a:p>
             <a:pPr algn="ctr"/>
+            <a:endParaRPr/>
           </a:p>
         </p:txBody>
       </p:sp>
@@ -5979,6 +6427,7 @@
           <a:lstStyle/>
           <a:p>
             <a:pPr algn="ctr"/>
+            <a:endParaRPr/>
           </a:p>
         </p:txBody>
       </p:sp>
@@ -6192,6 +6641,7 @@
           <a:lstStyle/>
           <a:p>
             <a:pPr algn="ctr"/>
+            <a:endParaRPr/>
           </a:p>
         </p:txBody>
       </p:sp>
@@ -6325,6 +6775,7 @@
                 <a:latin typeface="Consolas"/>
               </a:defRPr>
             </a:pPr>
+            <a:endParaRPr/>
           </a:p>
           <a:p>
             <a:pPr>
@@ -6370,6 +6821,7 @@
                 <a:latin typeface="Consolas"/>
               </a:defRPr>
             </a:pPr>
+            <a:endParaRPr/>
           </a:p>
           <a:p>
             <a:pPr>
@@ -6414,7 +6866,7 @@
 </file>
 
 <file path=ppt/slides/slide5.xml><?xml version="1.0" encoding="utf-8"?>
-<p:sld xmlns:a="http://schemas.openxmlformats.org/drawingml/2006/main" xmlns:p="http://schemas.openxmlformats.org/presentationml/2006/main" xmlns:r="http://schemas.openxmlformats.org/officeDocument/2006/relationships">
+<p:sld xmlns:a="http://schemas.openxmlformats.org/drawingml/2006/main" xmlns:r="http://schemas.openxmlformats.org/officeDocument/2006/relationships" xmlns:p="http://schemas.openxmlformats.org/presentationml/2006/main">
   <p:cSld>
     <p:spTree>
       <p:nvGrpSpPr>
@@ -6422,7 +6874,14 @@
         <p:cNvGrpSpPr/>
         <p:nvPr/>
       </p:nvGrpSpPr>
-      <p:grpSpPr/>
+      <p:grpSpPr>
+        <a:xfrm>
+          <a:off x="0" y="0"/>
+          <a:ext cx="0" cy="0"/>
+          <a:chOff x="0" y="0"/>
+          <a:chExt cx="0" cy="0"/>
+        </a:xfrm>
+      </p:grpSpPr>
       <p:sp>
         <p:nvSpPr>
           <p:cNvPr id="2" name="Rectangle 1"/>
@@ -6463,6 +6922,7 @@
           <a:lstStyle/>
           <a:p>
             <a:pPr algn="ctr"/>
+            <a:endParaRPr/>
           </a:p>
         </p:txBody>
       </p:sp>
@@ -6616,6 +7076,7 @@
           <a:lstStyle/>
           <a:p>
             <a:pPr algn="ctr"/>
+            <a:endParaRPr/>
           </a:p>
         </p:txBody>
       </p:sp>
@@ -6896,6 +7357,7 @@
           <a:lstStyle/>
           <a:p>
             <a:pPr algn="ctr"/>
+            <a:endParaRPr/>
           </a:p>
         </p:txBody>
       </p:sp>
@@ -7092,7 +7554,7 @@
 </file>
 
 <file path=ppt/slides/slide6.xml><?xml version="1.0" encoding="utf-8"?>
-<p:sld xmlns:a="http://schemas.openxmlformats.org/drawingml/2006/main" xmlns:p="http://schemas.openxmlformats.org/presentationml/2006/main" xmlns:r="http://schemas.openxmlformats.org/officeDocument/2006/relationships">
+<p:sld xmlns:a="http://schemas.openxmlformats.org/drawingml/2006/main" xmlns:r="http://schemas.openxmlformats.org/officeDocument/2006/relationships" xmlns:p="http://schemas.openxmlformats.org/presentationml/2006/main">
   <p:cSld>
     <p:spTree>
       <p:nvGrpSpPr>
@@ -7100,7 +7562,14 @@
         <p:cNvGrpSpPr/>
         <p:nvPr/>
       </p:nvGrpSpPr>
-      <p:grpSpPr/>
+      <p:grpSpPr>
+        <a:xfrm>
+          <a:off x="0" y="0"/>
+          <a:ext cx="0" cy="0"/>
+          <a:chOff x="0" y="0"/>
+          <a:chExt cx="0" cy="0"/>
+        </a:xfrm>
+      </p:grpSpPr>
       <p:sp>
         <p:nvSpPr>
           <p:cNvPr id="2" name="Rectangle 1"/>
@@ -7141,6 +7610,7 @@
           <a:lstStyle/>
           <a:p>
             <a:pPr algn="ctr"/>
+            <a:endParaRPr/>
           </a:p>
         </p:txBody>
       </p:sp>
@@ -7294,6 +7764,7 @@
           <a:lstStyle/>
           <a:p>
             <a:pPr algn="ctr"/>
+            <a:endParaRPr/>
           </a:p>
         </p:txBody>
       </p:sp>
@@ -7523,6 +7994,7 @@
           <a:lstStyle/>
           <a:p>
             <a:pPr algn="ctr"/>
+            <a:endParaRPr/>
           </a:p>
         </p:txBody>
       </p:sp>
@@ -7719,7 +8191,7 @@
 </file>
 
 <file path=ppt/slides/slide7.xml><?xml version="1.0" encoding="utf-8"?>
-<p:sld xmlns:a="http://schemas.openxmlformats.org/drawingml/2006/main" xmlns:p="http://schemas.openxmlformats.org/presentationml/2006/main" xmlns:r="http://schemas.openxmlformats.org/officeDocument/2006/relationships">
+<p:sld xmlns:a="http://schemas.openxmlformats.org/drawingml/2006/main" xmlns:r="http://schemas.openxmlformats.org/officeDocument/2006/relationships" xmlns:p="http://schemas.openxmlformats.org/presentationml/2006/main">
   <p:cSld>
     <p:spTree>
       <p:nvGrpSpPr>
@@ -7727,7 +8199,14 @@
         <p:cNvGrpSpPr/>
         <p:nvPr/>
       </p:nvGrpSpPr>
-      <p:grpSpPr/>
+      <p:grpSpPr>
+        <a:xfrm>
+          <a:off x="0" y="0"/>
+          <a:ext cx="0" cy="0"/>
+          <a:chOff x="0" y="0"/>
+          <a:chExt cx="0" cy="0"/>
+        </a:xfrm>
+      </p:grpSpPr>
       <p:sp>
         <p:nvSpPr>
           <p:cNvPr id="2" name="Rectangle 1"/>
@@ -7768,6 +8247,7 @@
           <a:lstStyle/>
           <a:p>
             <a:pPr algn="ctr"/>
+            <a:endParaRPr/>
           </a:p>
         </p:txBody>
       </p:sp>
@@ -7921,6 +8401,7 @@
           <a:lstStyle/>
           <a:p>
             <a:pPr algn="ctr"/>
+            <a:endParaRPr/>
           </a:p>
         </p:txBody>
       </p:sp>
@@ -8182,6 +8663,7 @@
           <a:lstStyle/>
           <a:p>
             <a:pPr algn="ctr"/>
+            <a:endParaRPr/>
           </a:p>
         </p:txBody>
       </p:sp>
@@ -8346,7 +8828,7 @@
 </file>
 
 <file path=ppt/slides/slide8.xml><?xml version="1.0" encoding="utf-8"?>
-<p:sld xmlns:a="http://schemas.openxmlformats.org/drawingml/2006/main" xmlns:p="http://schemas.openxmlformats.org/presentationml/2006/main" xmlns:r="http://schemas.openxmlformats.org/officeDocument/2006/relationships">
+<p:sld xmlns:a="http://schemas.openxmlformats.org/drawingml/2006/main" xmlns:r="http://schemas.openxmlformats.org/officeDocument/2006/relationships" xmlns:p="http://schemas.openxmlformats.org/presentationml/2006/main">
   <p:cSld>
     <p:spTree>
       <p:nvGrpSpPr>
@@ -8354,7 +8836,14 @@
         <p:cNvGrpSpPr/>
         <p:nvPr/>
       </p:nvGrpSpPr>
-      <p:grpSpPr/>
+      <p:grpSpPr>
+        <a:xfrm>
+          <a:off x="0" y="0"/>
+          <a:ext cx="0" cy="0"/>
+          <a:chOff x="0" y="0"/>
+          <a:chExt cx="0" cy="0"/>
+        </a:xfrm>
+      </p:grpSpPr>
       <p:sp>
         <p:nvSpPr>
           <p:cNvPr id="2" name="Rectangle 1"/>
@@ -8395,6 +8884,7 @@
           <a:lstStyle/>
           <a:p>
             <a:pPr algn="ctr"/>
+            <a:endParaRPr/>
           </a:p>
         </p:txBody>
       </p:sp>
@@ -8548,6 +9038,7 @@
           <a:lstStyle/>
           <a:p>
             <a:pPr algn="ctr"/>
+            <a:endParaRPr/>
           </a:p>
         </p:txBody>
       </p:sp>
@@ -8777,6 +9268,7 @@
           <a:lstStyle/>
           <a:p>
             <a:pPr algn="ctr"/>
+            <a:endParaRPr/>
           </a:p>
         </p:txBody>
       </p:sp>
@@ -8973,7 +9465,7 @@
 </file>
 
 <file path=ppt/slides/slide9.xml><?xml version="1.0" encoding="utf-8"?>
-<p:sld xmlns:a="http://schemas.openxmlformats.org/drawingml/2006/main" xmlns:p="http://schemas.openxmlformats.org/presentationml/2006/main" xmlns:r="http://schemas.openxmlformats.org/officeDocument/2006/relationships">
+<p:sld xmlns:a="http://schemas.openxmlformats.org/drawingml/2006/main" xmlns:r="http://schemas.openxmlformats.org/officeDocument/2006/relationships" xmlns:p="http://schemas.openxmlformats.org/presentationml/2006/main">
   <p:cSld>
     <p:spTree>
       <p:nvGrpSpPr>
@@ -8981,7 +9473,14 @@
         <p:cNvGrpSpPr/>
         <p:nvPr/>
       </p:nvGrpSpPr>
-      <p:grpSpPr/>
+      <p:grpSpPr>
+        <a:xfrm>
+          <a:off x="0" y="0"/>
+          <a:ext cx="0" cy="0"/>
+          <a:chOff x="0" y="0"/>
+          <a:chExt cx="0" cy="0"/>
+        </a:xfrm>
+      </p:grpSpPr>
       <p:sp>
         <p:nvSpPr>
           <p:cNvPr id="2" name="Rectangle 1"/>
@@ -9022,6 +9521,7 @@
           <a:lstStyle/>
           <a:p>
             <a:pPr algn="ctr"/>
+            <a:endParaRPr/>
           </a:p>
         </p:txBody>
       </p:sp>
@@ -9175,6 +9675,7 @@
           <a:lstStyle/>
           <a:p>
             <a:pPr algn="ctr"/>
+            <a:endParaRPr/>
           </a:p>
         </p:txBody>
       </p:sp>
@@ -9420,6 +9921,7 @@
           <a:lstStyle/>
           <a:p>
             <a:pPr algn="ctr"/>
+            <a:endParaRPr/>
           </a:p>
         </p:txBody>
       </p:sp>
